--- a/slides/pptx/week07.pptx
+++ b/slides/pptx/week07.pptx
@@ -685,7 +685,8 @@
           <a:p>
             <a:r>
               <a:rPr lang="en-US" dirty="0"/>
-              <a:t>Fast recap — cold-call one student per row to give the one-liner from memory. Don't lecture; it's retrieval practice. Same unifying shape as Week 1's own trust-boundary concept: input crosses, a control sits at the crossing — the map makes that pattern visible across all 6 weeks at once, not just stated per week. ~10 min.</a:t>
+              <a:t>Fast recap — cold-call one student per row to give the one-liner from memory. Don't lecture; it's retrieval practice. Same unifying shape as Week 1's own trust-boundary concept: input crosses, a control sits at the crossing — the map makes that pattern visible across all 6 weeks at once, not just stated per week. ~10 min.
+Diagram: A revision map of weeks 1 to 6: untrusted input crosses a trust boundary toward a sink, and every week places its control exactly at that crossing. Week 1 threat modeling: draw the DFD, run STRIDE at each crossing. Week 2 SDLC/tooling: Semgrep, Gitleaks, DAST and fuzzing catch what rides through commit/build/run unseen. Week 3 crypto: argon2id + AES-GCM with the key from the environment, not MD5/ECB with a fixed key. Week 4 injection: a parameterized query, no shell, an allow-list on the host. Week 5 XSS/CSRF: contextual encoding, a strict CSP, SameSite plus a real CSRF token. Week 6 auth: deny by default, a server-side owner check, and verifying the JWT's algorithm and signature.</a:t>
             </a:r>
             <a:endParaRPr lang="en-US" dirty="0"/>
           </a:p>
@@ -1500,7 +1501,7 @@
       </p:grpSpPr>
       <p:pic>
         <p:nvPicPr>
-          <p:cNvPr id="2" name="Image 0" descr="/Users/pop7/Library/CloudStorage/OneDrive-MonsterConnectCo.,Ltd/Lecture/KOSEN69 - software-security/slides/pptx/assets/logo-small.png">    </p:cNvPr>
+          <p:cNvPr id="2" name="Image 0" descr="/private/tmp/claude-501/-Users-pop7-Library-CloudStorage-OneDrive-MonsterConnectCo--Ltd-Lecture-KOSEN69---software-security/e6d6556f-17de-403d-a9a0-cf2f846149b4/scratchpad/tree/slides/pptx/assets/logo-small.png">    </p:cNvPr>
           <p:cNvPicPr>
             <a:picLocks noChangeAspect="1"/>
           </p:cNvPicPr>
@@ -1942,7 +1943,7 @@
       </p:sp>
       <p:pic>
         <p:nvPicPr>
-          <p:cNvPr id="8" name="Image 1" descr="/Users/pop7/Library/CloudStorage/OneDrive-MonsterConnectCo.,Ltd/Lecture/KOSEN69 - software-security/slides/pptx/assets/logo-small.png">    </p:cNvPr>
+          <p:cNvPr id="8" name="Image 1" descr="/private/tmp/claude-501/-Users-pop7-Library-CloudStorage-OneDrive-MonsterConnectCo--Ltd-Lecture-KOSEN69---software-security/e6d6556f-17de-403d-a9a0-cf2f846149b4/scratchpad/tree/slides/pptx/assets/logo-small.png">    </p:cNvPr>
           <p:cNvPicPr>
             <a:picLocks noChangeAspect="1"/>
           </p:cNvPicPr>
@@ -2086,50 +2087,33 @@
           </a:p>
         </p:txBody>
       </p:sp>
-      <p:sp>
-        <p:nvSpPr>
-          <p:cNvPr id="5" name="Text 2"/>
-          <p:cNvSpPr/>
-          <p:nvPr/>
-        </p:nvSpPr>
-        <p:spPr>
-          <a:xfrm>
-            <a:off x="548640" y="1325880"/>
-            <a:ext cx="8046720" cy="2743200"/>
-          </a:xfrm>
-          <a:prstGeom prst="rect">
-            <a:avLst/>
-          </a:prstGeom>
-          <a:noFill/>
-          <a:ln/>
-        </p:spPr>
-        <p:txBody>
-          <a:bodyPr wrap="square" lIns="0" tIns="0" rIns="0" bIns="0" rtlCol="0" anchor="t">
-            <a:normAutofit/>
-          </a:bodyPr>
-          <a:lstStyle/>
-          <a:p>
-            <a:pPr indent="0" marL="0">
-              <a:buNone/>
-            </a:pPr>
-            <a:r>
-              <a:rPr lang="en-US" sz="1400" dirty="0">
-                <a:solidFill>
-                  <a:srgbClr val="1F2937"/>
-                </a:solidFill>
-                <a:latin typeface="Calibri" pitchFamily="34" charset="0"/>
-                <a:ea typeface="Calibri" pitchFamily="34" charset="-122"/>
-                <a:cs typeface="Calibri" pitchFamily="34" charset="-120"/>
-              </a:rPr>
-              <a:t>See diagram: A revision map of weeks 1 to 6: untrusted input crosses a trust boundary toward a sink, and every week places its control exactly at that crossing. Week 1 threat modeling: draw the DFD, run STRIDE at each crossing. Week 2 SDLC/tooling: Semgrep, Gitleaks, DAST and fuzzing catch what rides through commit/build/run unseen. Week 3 crypto: argon2id + AES-GCM with the key from the environment, not MD5/ECB with a fixed key. Week 4 injection: a parameterized query, no shell, an allow-list on the host. Week 5 XSS/CSRF: contextual encoding, a strict CSP, SameSite plus a real CSRF token. Week 6 auth: deny by default, a server-side owner check, and verifying the JWT's algorithm and signature. (web only)</a:t>
-            </a:r>
-            <a:endParaRPr lang="en-US" sz="1400" dirty="0"/>
-          </a:p>
-        </p:txBody>
-      </p:sp>
-      <p:sp>
-        <p:nvSpPr>
-          <p:cNvPr id="6" name="Text 3"/>
+      <p:pic>
+        <p:nvPicPr>
+          <p:cNvPr id="5" name="Image 1" descr="A revision map of weeks 1 to 6: untrusted input crosses a trust boundary toward a sink, and every week places its control exactly at that crossing. Week 1 threat modeling: draw the DFD, run STRIDE at each crossing. Week 2 SDLC/tooling: Semgrep, Gitleaks, DAST and fuzzing catch what rides through commit/build/run unseen. Week 3 crypto: argon2id + AES-GCM with the key from the environment, not MD5/ECB with a fixed key. Week 4 injection: a parameterized query, no shell, an allow-list on the host. Week 5 XSS/CSRF: contextual encoding, a strict CSP, SameSite plus a real CSRF token. Week 6 auth: deny by default, a server-side owner check, and verifying the JWT's algorithm and signature.">    </p:cNvPr>
+          <p:cNvPicPr>
+            <a:picLocks noChangeAspect="1"/>
+          </p:cNvPicPr>
+          <p:nvPr/>
+        </p:nvPicPr>
+        <p:blipFill>
+          <a:blip r:embed="rId2"/>
+          <a:stretch>
+            <a:fillRect/>
+          </a:stretch>
+        </p:blipFill>
+        <p:spPr>
+          <a:xfrm>
+            <a:off x="2404122" y="1097280"/>
+            <a:ext cx="4335757" cy="3566160"/>
+          </a:xfrm>
+          <a:prstGeom prst="rect">
+            <a:avLst/>
+          </a:prstGeom>
+        </p:spPr>
+      </p:pic>
+      <p:sp>
+        <p:nvSpPr>
+          <p:cNvPr id="6" name="Text 2"/>
           <p:cNvSpPr/>
           <p:nvPr/>
         </p:nvSpPr>
@@ -2168,14 +2152,14 @@
       </p:sp>
       <p:pic>
         <p:nvPicPr>
-          <p:cNvPr id="7" name="Image 1" descr="/Users/pop7/Library/CloudStorage/OneDrive-MonsterConnectCo.,Ltd/Lecture/KOSEN69 - software-security/slides/pptx/assets/logo-small.png">    </p:cNvPr>
+          <p:cNvPr id="7" name="Image 2" descr="/private/tmp/claude-501/-Users-pop7-Library-CloudStorage-OneDrive-MonsterConnectCo--Ltd-Lecture-KOSEN69---software-security/e6d6556f-17de-403d-a9a0-cf2f846149b4/scratchpad/tree/slides/pptx/assets/logo-small.png">    </p:cNvPr>
           <p:cNvPicPr>
             <a:picLocks noChangeAspect="1"/>
           </p:cNvPicPr>
           <p:nvPr/>
         </p:nvPicPr>
         <p:blipFill>
-          <a:blip r:embed="rId2"/>
+          <a:blip r:embed="rId3"/>
           <a:stretch>
             <a:fillRect/>
           </a:stretch>
@@ -2796,7 +2780,7 @@
       </p:sp>
       <p:pic>
         <p:nvPicPr>
-          <p:cNvPr id="8" name="Image 1" descr="/Users/pop7/Library/CloudStorage/OneDrive-MonsterConnectCo.,Ltd/Lecture/KOSEN69 - software-security/slides/pptx/assets/logo-small.png">    </p:cNvPr>
+          <p:cNvPr id="8" name="Image 1" descr="/private/tmp/claude-501/-Users-pop7-Library-CloudStorage-OneDrive-MonsterConnectCo--Ltd-Lecture-KOSEN69---software-security/e6d6556f-17de-403d-a9a0-cf2f846149b4/scratchpad/tree/slides/pptx/assets/logo-small.png">    </p:cNvPr>
           <p:cNvPicPr>
             <a:picLocks noChangeAspect="1"/>
           </p:cNvPicPr>
@@ -3222,7 +3206,7 @@
       </p:sp>
       <p:pic>
         <p:nvPicPr>
-          <p:cNvPr id="11" name="Image 1" descr="/Users/pop7/Library/CloudStorage/OneDrive-MonsterConnectCo.,Ltd/Lecture/KOSEN69 - software-security/slides/pptx/assets/logo-small.png">    </p:cNvPr>
+          <p:cNvPr id="11" name="Image 1" descr="/private/tmp/claude-501/-Users-pop7-Library-CloudStorage-OneDrive-MonsterConnectCo--Ltd-Lecture-KOSEN69---software-security/e6d6556f-17de-403d-a9a0-cf2f846149b4/scratchpad/tree/slides/pptx/assets/logo-small.png">    </p:cNvPr>
           <p:cNvPicPr>
             <a:picLocks noChangeAspect="1"/>
           </p:cNvPicPr>
@@ -3544,7 +3528,7 @@
       </p:sp>
       <p:pic>
         <p:nvPicPr>
-          <p:cNvPr id="8" name="Image 1" descr="/Users/pop7/Library/CloudStorage/OneDrive-MonsterConnectCo.,Ltd/Lecture/KOSEN69 - software-security/slides/pptx/assets/logo-small.png">    </p:cNvPr>
+          <p:cNvPr id="8" name="Image 1" descr="/private/tmp/claude-501/-Users-pop7-Library-CloudStorage-OneDrive-MonsterConnectCo--Ltd-Lecture-KOSEN69---software-security/e6d6556f-17de-403d-a9a0-cf2f846149b4/scratchpad/tree/slides/pptx/assets/logo-small.png">    </p:cNvPr>
           <p:cNvPicPr>
             <a:picLocks noChangeAspect="1"/>
           </p:cNvPicPr>
@@ -3770,7 +3754,7 @@
       </p:sp>
       <p:pic>
         <p:nvPicPr>
-          <p:cNvPr id="7" name="Image 1" descr="/Users/pop7/Library/CloudStorage/OneDrive-MonsterConnectCo.,Ltd/Lecture/KOSEN69 - software-security/slides/pptx/assets/logo-small.png">    </p:cNvPr>
+          <p:cNvPr id="7" name="Image 1" descr="/private/tmp/claude-501/-Users-pop7-Library-CloudStorage-OneDrive-MonsterConnectCo--Ltd-Lecture-KOSEN69---software-security/e6d6556f-17de-403d-a9a0-cf2f846149b4/scratchpad/tree/slides/pptx/assets/logo-small.png">    </p:cNvPr>
           <p:cNvPicPr>
             <a:picLocks noChangeAspect="1"/>
           </p:cNvPicPr>
@@ -3904,7 +3888,7 @@
       </p:sp>
       <p:pic>
         <p:nvPicPr>
-          <p:cNvPr id="4" name="Image 0" descr="/Users/pop7/Library/CloudStorage/OneDrive-MonsterConnectCo.,Ltd/Lecture/KOSEN69 - software-security/slides/pptx/assets/logo-small.png">    </p:cNvPr>
+          <p:cNvPr id="4" name="Image 0" descr="/private/tmp/claude-501/-Users-pop7-Library-CloudStorage-OneDrive-MonsterConnectCo--Ltd-Lecture-KOSEN69---software-security/e6d6556f-17de-403d-a9a0-cf2f846149b4/scratchpad/tree/slides/pptx/assets/logo-small.png">    </p:cNvPr>
           <p:cNvPicPr>
             <a:picLocks noChangeAspect="1"/>
           </p:cNvPicPr>
